--- a/textbook/ppt/chapter07_ppt.pptx
+++ b/textbook/ppt/chapter07_ppt.pptx
@@ -7,6 +7,12 @@
   <p:sldIdLst>
     <p:sldId id="256" r:id="rId7"/>
     <p:sldId id="257" r:id="rId8"/>
+    <p:sldId id="258" r:id="rId9"/>
+    <p:sldId id="259" r:id="rId10"/>
+    <p:sldId id="260" r:id="rId11"/>
+    <p:sldId id="261" r:id="rId12"/>
+    <p:sldId id="262" r:id="rId13"/>
+    <p:sldId id="263" r:id="rId14"/>
   </p:sldIdLst>
   <p:sldSz cx="12188952" cy="6858000" type="screen4x3"/>
   <p:notesSz cx="6858000" cy="9144000"/>
@@ -3229,6 +3235,632 @@
             <a:r>
               <a:rPr sz="1800"/>
               <a:t>• 回溯基础的基本概念与应用</a:t>
+            </a:r>
+          </a:p>
+        </p:txBody>
+      </p:sp>
+    </p:spTree>
+  </p:cSld>
+  <p:clrMapOvr>
+    <a:masterClrMapping/>
+  </p:clrMapOvr>
+</p:sld>
+</file>
+
+<file path=ppt/slides/slide3.xml><?xml version="1.0" encoding="utf-8"?>
+<p:sld xmlns:a="http://schemas.openxmlformats.org/drawingml/2006/main" xmlns:p="http://schemas.openxmlformats.org/presentationml/2006/main" xmlns:r="http://schemas.openxmlformats.org/officeDocument/2006/relationships">
+  <p:cSld>
+    <p:spTree>
+      <p:nvGrpSpPr>
+        <p:cNvPr id="1" name=""/>
+        <p:cNvGrpSpPr/>
+        <p:nvPr/>
+      </p:nvGrpSpPr>
+      <p:grpSpPr/>
+      <p:sp>
+        <p:nvSpPr>
+          <p:cNvPr id="2" name="TextBox 1"/>
+          <p:cNvSpPr txBox="1"/>
+          <p:nvPr/>
+        </p:nvSpPr>
+        <p:spPr>
+          <a:xfrm>
+            <a:off x="914400" y="457200"/>
+            <a:ext cx="10058400" cy="914400"/>
+          </a:xfrm>
+          <a:prstGeom prst="rect">
+            <a:avLst/>
+          </a:prstGeom>
+          <a:noFill/>
+        </p:spPr>
+        <p:txBody>
+          <a:bodyPr wrap="none">
+            <a:spAutoFit/>
+          </a:bodyPr>
+          <a:lstStyle/>
+          <a:p>
+            <a:r>
+              <a:rPr sz="2800" b="1">
+                <a:solidFill>
+                  <a:srgbClr val="8B0000"/>
+                </a:solidFill>
+              </a:rPr>
+              <a:t>本章概览</a:t>
+            </a:r>
+          </a:p>
+        </p:txBody>
+      </p:sp>
+      <p:sp>
+        <p:nvSpPr>
+          <p:cNvPr id="3" name="TextBox 2"/>
+          <p:cNvSpPr txBox="1"/>
+          <p:nvPr/>
+        </p:nvSpPr>
+        <p:spPr>
+          <a:xfrm>
+            <a:off x="914400" y="1371600"/>
+            <a:ext cx="10058400" cy="5029200"/>
+          </a:xfrm>
+          <a:prstGeom prst="rect">
+            <a:avLst/>
+          </a:prstGeom>
+          <a:noFill/>
+        </p:spPr>
+        <p:txBody>
+          <a:bodyPr wrap="none">
+            <a:spAutoFit/>
+          </a:bodyPr>
+          <a:lstStyle/>
+          <a:p/>
+          <a:p>
+            <a:r>
+              <a:rPr sz="1600">
+                <a:solidFill>
+                  <a:srgbClr val="000000"/>
+                </a:solidFill>
+              </a:rPr>
+              <a:t>函数 = 封装一段可复用的代码</a:t>
+            </a:r>
+          </a:p>
+          <a:p>
+            <a:r>
+              <a:rPr sz="1600">
+                <a:solidFill>
+                  <a:srgbClr val="000000"/>
+                </a:solidFill>
+              </a:rPr>
+              <a:t>参数传递：值传递 vs 引用传递</a:t>
+            </a:r>
+          </a:p>
+          <a:p>
+            <a:r>
+              <a:rPr sz="1600">
+                <a:solidFill>
+                  <a:srgbClr val="000000"/>
+                </a:solidFill>
+              </a:rPr>
+              <a:t>递归 = 函数调用自己</a:t>
+            </a:r>
+          </a:p>
+          <a:p>
+            <a:r>
+              <a:rPr sz="1600">
+                <a:solidFill>
+                  <a:srgbClr val="000000"/>
+                </a:solidFill>
+              </a:rPr>
+              <a:t>递归三要素：基线条件、递推关系、缩小规模</a:t>
+            </a:r>
+          </a:p>
+        </p:txBody>
+      </p:sp>
+    </p:spTree>
+  </p:cSld>
+  <p:clrMapOvr>
+    <a:masterClrMapping/>
+  </p:clrMapOvr>
+</p:sld>
+</file>
+
+<file path=ppt/slides/slide4.xml><?xml version="1.0" encoding="utf-8"?>
+<p:sld xmlns:a="http://schemas.openxmlformats.org/drawingml/2006/main" xmlns:p="http://schemas.openxmlformats.org/presentationml/2006/main" xmlns:r="http://schemas.openxmlformats.org/officeDocument/2006/relationships">
+  <p:cSld>
+    <p:spTree>
+      <p:nvGrpSpPr>
+        <p:cNvPr id="1" name=""/>
+        <p:cNvGrpSpPr/>
+        <p:nvPr/>
+      </p:nvGrpSpPr>
+      <p:grpSpPr/>
+      <p:sp>
+        <p:nvSpPr>
+          <p:cNvPr id="2" name="TextBox 1"/>
+          <p:cNvSpPr txBox="1"/>
+          <p:nvPr/>
+        </p:nvSpPr>
+        <p:spPr>
+          <a:xfrm>
+            <a:off x="914400" y="457200"/>
+            <a:ext cx="10058400" cy="914400"/>
+          </a:xfrm>
+          <a:prstGeom prst="rect">
+            <a:avLst/>
+          </a:prstGeom>
+          <a:noFill/>
+        </p:spPr>
+        <p:txBody>
+          <a:bodyPr wrap="none">
+            <a:spAutoFit/>
+          </a:bodyPr>
+          <a:lstStyle/>
+          <a:p>
+            <a:r>
+              <a:rPr sz="2800" b="1">
+                <a:solidFill>
+                  <a:srgbClr val="8B0000"/>
+                </a:solidFill>
+              </a:rPr>
+              <a:t>C++ 代码示例</a:t>
+            </a:r>
+          </a:p>
+        </p:txBody>
+      </p:sp>
+      <p:sp>
+        <p:nvSpPr>
+          <p:cNvPr id="3" name="TextBox 2"/>
+          <p:cNvSpPr txBox="1"/>
+          <p:nvPr/>
+        </p:nvSpPr>
+        <p:spPr>
+          <a:xfrm>
+            <a:off x="914400" y="1371600"/>
+            <a:ext cx="10058400" cy="5029200"/>
+          </a:xfrm>
+          <a:prstGeom prst="rect">
+            <a:avLst/>
+          </a:prstGeom>
+          <a:noFill/>
+        </p:spPr>
+        <p:txBody>
+          <a:bodyPr wrap="none">
+            <a:spAutoFit/>
+          </a:bodyPr>
+          <a:lstStyle/>
+          <a:p/>
+          <a:p>
+            <a:r>
+              <a:rPr sz="1400">
+                <a:solidFill>
+                  <a:srgbClr val="000000"/>
+                </a:solidFill>
+              </a:rPr>
+              <a:t>int gcd(int a, int b) {
+    if (b == 0) return a;
+    return gcd(b, a % b);
+}</a:t>
+            </a:r>
+          </a:p>
+        </p:txBody>
+      </p:sp>
+    </p:spTree>
+  </p:cSld>
+  <p:clrMapOvr>
+    <a:masterClrMapping/>
+  </p:clrMapOvr>
+</p:sld>
+</file>
+
+<file path=ppt/slides/slide5.xml><?xml version="1.0" encoding="utf-8"?>
+<p:sld xmlns:a="http://schemas.openxmlformats.org/drawingml/2006/main" xmlns:p="http://schemas.openxmlformats.org/presentationml/2006/main" xmlns:r="http://schemas.openxmlformats.org/officeDocument/2006/relationships">
+  <p:cSld>
+    <p:spTree>
+      <p:nvGrpSpPr>
+        <p:cNvPr id="1" name=""/>
+        <p:cNvGrpSpPr/>
+        <p:nvPr/>
+      </p:nvGrpSpPr>
+      <p:grpSpPr/>
+      <p:sp>
+        <p:nvSpPr>
+          <p:cNvPr id="2" name="TextBox 1"/>
+          <p:cNvSpPr txBox="1"/>
+          <p:nvPr/>
+        </p:nvSpPr>
+        <p:spPr>
+          <a:xfrm>
+            <a:off x="914400" y="457200"/>
+            <a:ext cx="10058400" cy="914400"/>
+          </a:xfrm>
+          <a:prstGeom prst="rect">
+            <a:avLst/>
+          </a:prstGeom>
+          <a:noFill/>
+        </p:spPr>
+        <p:txBody>
+          <a:bodyPr wrap="none">
+            <a:spAutoFit/>
+          </a:bodyPr>
+          <a:lstStyle/>
+          <a:p>
+            <a:r>
+              <a:rPr sz="2800" b="1">
+                <a:solidFill>
+                  <a:srgbClr val="8B0000"/>
+                </a:solidFill>
+              </a:rPr>
+              <a:t>Python 代码示例</a:t>
+            </a:r>
+          </a:p>
+        </p:txBody>
+      </p:sp>
+      <p:sp>
+        <p:nvSpPr>
+          <p:cNvPr id="3" name="TextBox 2"/>
+          <p:cNvSpPr txBox="1"/>
+          <p:nvPr/>
+        </p:nvSpPr>
+        <p:spPr>
+          <a:xfrm>
+            <a:off x="914400" y="1371600"/>
+            <a:ext cx="10058400" cy="5029200"/>
+          </a:xfrm>
+          <a:prstGeom prst="rect">
+            <a:avLst/>
+          </a:prstGeom>
+          <a:noFill/>
+        </p:spPr>
+        <p:txBody>
+          <a:bodyPr wrap="none">
+            <a:spAutoFit/>
+          </a:bodyPr>
+          <a:lstStyle/>
+          <a:p/>
+          <a:p>
+            <a:r>
+              <a:rPr sz="1400">
+                <a:solidFill>
+                  <a:srgbClr val="000000"/>
+                </a:solidFill>
+              </a:rPr>
+              <a:t>def gcd(a, b):
+    if b == 0:
+        return a
+    return gcd(b, a % b)</a:t>
+            </a:r>
+          </a:p>
+        </p:txBody>
+      </p:sp>
+    </p:spTree>
+  </p:cSld>
+  <p:clrMapOvr>
+    <a:masterClrMapping/>
+  </p:clrMapOvr>
+</p:sld>
+</file>
+
+<file path=ppt/slides/slide6.xml><?xml version="1.0" encoding="utf-8"?>
+<p:sld xmlns:a="http://schemas.openxmlformats.org/drawingml/2006/main" xmlns:p="http://schemas.openxmlformats.org/presentationml/2006/main" xmlns:r="http://schemas.openxmlformats.org/officeDocument/2006/relationships">
+  <p:cSld>
+    <p:spTree>
+      <p:nvGrpSpPr>
+        <p:cNvPr id="1" name=""/>
+        <p:cNvGrpSpPr/>
+        <p:nvPr/>
+      </p:nvGrpSpPr>
+      <p:grpSpPr/>
+      <p:sp>
+        <p:nvSpPr>
+          <p:cNvPr id="2" name="TextBox 1"/>
+          <p:cNvSpPr txBox="1"/>
+          <p:nvPr/>
+        </p:nvSpPr>
+        <p:spPr>
+          <a:xfrm>
+            <a:off x="914400" y="457200"/>
+            <a:ext cx="10058400" cy="914400"/>
+          </a:xfrm>
+          <a:prstGeom prst="rect">
+            <a:avLst/>
+          </a:prstGeom>
+          <a:noFill/>
+        </p:spPr>
+        <p:txBody>
+          <a:bodyPr wrap="none">
+            <a:spAutoFit/>
+          </a:bodyPr>
+          <a:lstStyle/>
+          <a:p>
+            <a:r>
+              <a:rPr sz="2800" b="1">
+                <a:solidFill>
+                  <a:srgbClr val="8B0000"/>
+                </a:solidFill>
+              </a:rPr>
+              <a:t>常见错误</a:t>
+            </a:r>
+          </a:p>
+        </p:txBody>
+      </p:sp>
+      <p:sp>
+        <p:nvSpPr>
+          <p:cNvPr id="3" name="TextBox 2"/>
+          <p:cNvSpPr txBox="1"/>
+          <p:nvPr/>
+        </p:nvSpPr>
+        <p:spPr>
+          <a:xfrm>
+            <a:off x="914400" y="1371600"/>
+            <a:ext cx="10058400" cy="5029200"/>
+          </a:xfrm>
+          <a:prstGeom prst="rect">
+            <a:avLst/>
+          </a:prstGeom>
+          <a:noFill/>
+        </p:spPr>
+        <p:txBody>
+          <a:bodyPr wrap="none">
+            <a:spAutoFit/>
+          </a:bodyPr>
+          <a:lstStyle/>
+          <a:p/>
+          <a:p>
+            <a:r>
+              <a:rPr sz="1600">
+                <a:solidFill>
+                  <a:srgbClr val="000000"/>
+                </a:solidFill>
+              </a:rPr>
+              <a:t>递归没有基线条件→栈溢出</a:t>
+            </a:r>
+          </a:p>
+          <a:p>
+            <a:r>
+              <a:rPr sz="1600">
+                <a:solidFill>
+                  <a:srgbClr val="000000"/>
+                </a:solidFill>
+              </a:rPr>
+              <a:t>忘记return返回值</a:t>
+            </a:r>
+          </a:p>
+          <a:p>
+            <a:r>
+              <a:rPr sz="1600">
+                <a:solidFill>
+                  <a:srgbClr val="000000"/>
+                </a:solidFill>
+              </a:rPr>
+              <a:t>C++引用参数用&amp;，Python不需要</a:t>
+            </a:r>
+          </a:p>
+          <a:p>
+            <a:r>
+              <a:rPr sz="1600">
+                <a:solidFill>
+                  <a:srgbClr val="000000"/>
+                </a:solidFill>
+              </a:rPr>
+              <a:t>递归效率低，考虑记忆化</a:t>
+            </a:r>
+          </a:p>
+        </p:txBody>
+      </p:sp>
+    </p:spTree>
+  </p:cSld>
+  <p:clrMapOvr>
+    <a:masterClrMapping/>
+  </p:clrMapOvr>
+</p:sld>
+</file>
+
+<file path=ppt/slides/slide7.xml><?xml version="1.0" encoding="utf-8"?>
+<p:sld xmlns:a="http://schemas.openxmlformats.org/drawingml/2006/main" xmlns:p="http://schemas.openxmlformats.org/presentationml/2006/main" xmlns:r="http://schemas.openxmlformats.org/officeDocument/2006/relationships">
+  <p:cSld>
+    <p:spTree>
+      <p:nvGrpSpPr>
+        <p:cNvPr id="1" name=""/>
+        <p:cNvGrpSpPr/>
+        <p:nvPr/>
+      </p:nvGrpSpPr>
+      <p:grpSpPr/>
+      <p:sp>
+        <p:nvSpPr>
+          <p:cNvPr id="2" name="TextBox 1"/>
+          <p:cNvSpPr txBox="1"/>
+          <p:nvPr/>
+        </p:nvSpPr>
+        <p:spPr>
+          <a:xfrm>
+            <a:off x="914400" y="457200"/>
+            <a:ext cx="10058400" cy="914400"/>
+          </a:xfrm>
+          <a:prstGeom prst="rect">
+            <a:avLst/>
+          </a:prstGeom>
+          <a:noFill/>
+        </p:spPr>
+        <p:txBody>
+          <a:bodyPr wrap="none">
+            <a:spAutoFit/>
+          </a:bodyPr>
+          <a:lstStyle/>
+          <a:p>
+            <a:r>
+              <a:rPr sz="2800" b="1">
+                <a:solidFill>
+                  <a:srgbClr val="8B0000"/>
+                </a:solidFill>
+              </a:rPr>
+              <a:t>练习题目</a:t>
+            </a:r>
+          </a:p>
+        </p:txBody>
+      </p:sp>
+      <p:sp>
+        <p:nvSpPr>
+          <p:cNvPr id="3" name="TextBox 2"/>
+          <p:cNvSpPr txBox="1"/>
+          <p:nvPr/>
+        </p:nvSpPr>
+        <p:spPr>
+          <a:xfrm>
+            <a:off x="914400" y="1371600"/>
+            <a:ext cx="10058400" cy="5029200"/>
+          </a:xfrm>
+          <a:prstGeom prst="rect">
+            <a:avLst/>
+          </a:prstGeom>
+          <a:noFill/>
+        </p:spPr>
+        <p:txBody>
+          <a:bodyPr wrap="none">
+            <a:spAutoFit/>
+          </a:bodyPr>
+          <a:lstStyle/>
+          <a:p/>
+          <a:p>
+            <a:r>
+              <a:rPr sz="1600">
+                <a:solidFill>
+                  <a:srgbClr val="000000"/>
+                </a:solidFill>
+              </a:rPr>
+              <a:t>JD081 初窥阶乘</a:t>
+            </a:r>
+          </a:p>
+          <a:p>
+            <a:r>
+              <a:rPr sz="1600">
+                <a:solidFill>
+                  <a:srgbClr val="000000"/>
+                </a:solidFill>
+              </a:rPr>
+              <a:t>JD085 辗转相除</a:t>
+            </a:r>
+          </a:p>
+          <a:p>
+            <a:r>
+              <a:rPr sz="1600">
+                <a:solidFill>
+                  <a:srgbClr val="000000"/>
+                </a:solidFill>
+              </a:rPr>
+              <a:t>JD093 登阶问道</a:t>
+            </a:r>
+          </a:p>
+        </p:txBody>
+      </p:sp>
+    </p:spTree>
+  </p:cSld>
+  <p:clrMapOvr>
+    <a:masterClrMapping/>
+  </p:clrMapOvr>
+</p:sld>
+</file>
+
+<file path=ppt/slides/slide8.xml><?xml version="1.0" encoding="utf-8"?>
+<p:sld xmlns:a="http://schemas.openxmlformats.org/drawingml/2006/main" xmlns:p="http://schemas.openxmlformats.org/presentationml/2006/main" xmlns:r="http://schemas.openxmlformats.org/officeDocument/2006/relationships">
+  <p:cSld>
+    <p:spTree>
+      <p:nvGrpSpPr>
+        <p:cNvPr id="1" name=""/>
+        <p:cNvGrpSpPr/>
+        <p:nvPr/>
+      </p:nvGrpSpPr>
+      <p:grpSpPr/>
+      <p:sp>
+        <p:nvSpPr>
+          <p:cNvPr id="2" name="TextBox 1"/>
+          <p:cNvSpPr txBox="1"/>
+          <p:nvPr/>
+        </p:nvSpPr>
+        <p:spPr>
+          <a:xfrm>
+            <a:off x="914400" y="457200"/>
+            <a:ext cx="10058400" cy="914400"/>
+          </a:xfrm>
+          <a:prstGeom prst="rect">
+            <a:avLst/>
+          </a:prstGeom>
+          <a:noFill/>
+        </p:spPr>
+        <p:txBody>
+          <a:bodyPr wrap="none">
+            <a:spAutoFit/>
+          </a:bodyPr>
+          <a:lstStyle/>
+          <a:p>
+            <a:r>
+              <a:rPr sz="2800" b="1">
+                <a:solidFill>
+                  <a:srgbClr val="8B0000"/>
+                </a:solidFill>
+              </a:rPr>
+              <a:t>本章小结</a:t>
+            </a:r>
+          </a:p>
+        </p:txBody>
+      </p:sp>
+      <p:sp>
+        <p:nvSpPr>
+          <p:cNvPr id="3" name="TextBox 2"/>
+          <p:cNvSpPr txBox="1"/>
+          <p:nvPr/>
+        </p:nvSpPr>
+        <p:spPr>
+          <a:xfrm>
+            <a:off x="914400" y="1371600"/>
+            <a:ext cx="10058400" cy="5029200"/>
+          </a:xfrm>
+          <a:prstGeom prst="rect">
+            <a:avLst/>
+          </a:prstGeom>
+          <a:noFill/>
+        </p:spPr>
+        <p:txBody>
+          <a:bodyPr wrap="none">
+            <a:spAutoFit/>
+          </a:bodyPr>
+          <a:lstStyle/>
+          <a:p/>
+          <a:p>
+            <a:r>
+              <a:rPr sz="1600">
+                <a:solidFill>
+                  <a:srgbClr val="000000"/>
+                </a:solidFill>
+              </a:rPr>
+              <a:t>掌握核心概念</a:t>
+            </a:r>
+          </a:p>
+          <a:p>
+            <a:r>
+              <a:rPr sz="1600">
+                <a:solidFill>
+                  <a:srgbClr val="000000"/>
+                </a:solidFill>
+              </a:rPr>
+              <a:t>多做练习</a:t>
+            </a:r>
+          </a:p>
+          <a:p>
+            <a:r>
+              <a:rPr sz="1600">
+                <a:solidFill>
+                  <a:srgbClr val="000000"/>
+                </a:solidFill>
+              </a:rPr>
+              <a:t>注意边界条件</a:t>
+            </a:r>
+          </a:p>
+          <a:p>
+            <a:r>
+              <a:rPr sz="1600">
+                <a:solidFill>
+                  <a:srgbClr val="000000"/>
+                </a:solidFill>
+              </a:rPr>
+              <a:t>理解算法思想而非死记代码</a:t>
             </a:r>
           </a:p>
         </p:txBody>

--- a/textbook/ppt/chapter07_ppt.pptx
+++ b/textbook/ppt/chapter07_ppt.pptx
@@ -12,7 +12,6 @@
     <p:sldId id="260" r:id="rId11"/>
     <p:sldId id="261" r:id="rId12"/>
     <p:sldId id="262" r:id="rId13"/>
-    <p:sldId id="263" r:id="rId14"/>
   </p:sldIdLst>
   <p:sldSz cx="12188952" cy="6858000" type="screen4x3"/>
   <p:notesSz cx="6858000" cy="9144000"/>
@@ -3124,18 +3123,7 @@
                   <a:srgbClr val="8B0000"/>
                 </a:solidFill>
               </a:rPr>
-              <a:t>第7章 以招创招</a:t>
-            </a:r>
-          </a:p>
-          <a:p>
-            <a:pPr algn="ctr"/>
-            <a:r>
-              <a:rPr sz="2400">
-                <a:solidFill>
-                  <a:srgbClr val="6B5D4D"/>
-                </a:solidFill>
-              </a:rPr>
-              <a:t>函数与递归</a:t>
+              <a:t>第7章</a:t>
             </a:r>
           </a:p>
         </p:txBody>
@@ -3166,8 +3154,8 @@
         </p:nvSpPr>
         <p:spPr>
           <a:xfrm>
-            <a:off x="914400" y="457200"/>
-            <a:ext cx="10058400" cy="914400"/>
+            <a:off x="457200" y="274320"/>
+            <a:ext cx="10972800" cy="731520"/>
           </a:xfrm>
           <a:prstGeom prst="rect">
             <a:avLst/>
@@ -3181,7 +3169,7 @@
           <a:lstStyle/>
           <a:p>
             <a:r>
-              <a:rPr sz="2800" b="1">
+              <a:rPr sz="2400" b="1">
                 <a:solidFill>
                   <a:srgbClr val="8B0000"/>
                 </a:solidFill>
@@ -3199,8 +3187,8 @@
         </p:nvSpPr>
         <p:spPr>
           <a:xfrm>
-            <a:off x="914400" y="1371600"/>
-            <a:ext cx="10058400" cy="4572000"/>
+            <a:off x="457200" y="1097280"/>
+            <a:ext cx="10972800" cy="5029200"/>
           </a:xfrm>
           <a:prstGeom prst="rect">
             <a:avLst/>
@@ -3215,26 +3203,42 @@
           <a:p/>
           <a:p>
             <a:r>
-              <a:rPr sz="1800"/>
-              <a:t>• 函数定义与调用的基本概念与应用</a:t>
-            </a:r>
-          </a:p>
-          <a:p>
-            <a:r>
-              <a:rPr sz="1800"/>
-              <a:t>• 参数传递的基本概念与应用</a:t>
-            </a:r>
-          </a:p>
-          <a:p>
-            <a:r>
-              <a:rPr sz="1800"/>
-              <a:t>• 递归三要素的基本概念与应用</a:t>
-            </a:r>
-          </a:p>
-          <a:p>
-            <a:r>
-              <a:rPr sz="1800"/>
-              <a:t>• 回溯基础的基本概念与应用</a:t>
+              <a:rPr sz="1400">
+                <a:solidFill>
+                  <a:srgbClr val="000000"/>
+                </a:solidFill>
+              </a:rPr>
+              <a:t>函数 = 封装一段可复用的代码块</a:t>
+            </a:r>
+          </a:p>
+          <a:p>
+            <a:r>
+              <a:rPr sz="1400">
+                <a:solidFill>
+                  <a:srgbClr val="000000"/>
+                </a:solidFill>
+              </a:rPr>
+              <a:t>参数：传值 vs 传引用（C++）/ Python 都是传引用</a:t>
+            </a:r>
+          </a:p>
+          <a:p>
+            <a:r>
+              <a:rPr sz="1400">
+                <a:solidFill>
+                  <a:srgbClr val="000000"/>
+                </a:solidFill>
+              </a:rPr>
+              <a:t>递归 = 函数调用自己</a:t>
+            </a:r>
+          </a:p>
+          <a:p>
+            <a:r>
+              <a:rPr sz="1400">
+                <a:solidFill>
+                  <a:srgbClr val="000000"/>
+                </a:solidFill>
+              </a:rPr>
+              <a:t>递归三要素：基线条件、递推关系、缩小规模</a:t>
             </a:r>
           </a:p>
         </p:txBody>
@@ -3265,8 +3269,8 @@
         </p:nvSpPr>
         <p:spPr>
           <a:xfrm>
-            <a:off x="914400" y="457200"/>
-            <a:ext cx="10058400" cy="914400"/>
+            <a:off x="457200" y="274320"/>
+            <a:ext cx="10972800" cy="731520"/>
           </a:xfrm>
           <a:prstGeom prst="rect">
             <a:avLst/>
@@ -3280,12 +3284,12 @@
           <a:lstStyle/>
           <a:p>
             <a:r>
-              <a:rPr sz="2800" b="1">
+              <a:rPr sz="2400" b="1">
                 <a:solidFill>
                   <a:srgbClr val="8B0000"/>
                 </a:solidFill>
               </a:rPr>
-              <a:t>本章概览</a:t>
+              <a:t>C++ 代码示例</a:t>
             </a:r>
           </a:p>
         </p:txBody>
@@ -3298,8 +3302,8 @@
         </p:nvSpPr>
         <p:spPr>
           <a:xfrm>
-            <a:off x="914400" y="1371600"/>
-            <a:ext cx="10058400" cy="5029200"/>
+            <a:off x="457200" y="1097280"/>
+            <a:ext cx="10972800" cy="5029200"/>
           </a:xfrm>
           <a:prstGeom prst="rect">
             <a:avLst/>
@@ -3314,42 +3318,16 @@
           <a:p/>
           <a:p>
             <a:r>
-              <a:rPr sz="1600">
+              <a:rPr sz="1200">
                 <a:solidFill>
                   <a:srgbClr val="000000"/>
                 </a:solidFill>
               </a:rPr>
-              <a:t>函数 = 封装一段可复用的代码</a:t>
-            </a:r>
-          </a:p>
-          <a:p>
-            <a:r>
-              <a:rPr sz="1600">
-                <a:solidFill>
-                  <a:srgbClr val="000000"/>
-                </a:solidFill>
-              </a:rPr>
-              <a:t>参数传递：值传递 vs 引用传递</a:t>
-            </a:r>
-          </a:p>
-          <a:p>
-            <a:r>
-              <a:rPr sz="1600">
-                <a:solidFill>
-                  <a:srgbClr val="000000"/>
-                </a:solidFill>
-              </a:rPr>
-              <a:t>递归 = 函数调用自己</a:t>
-            </a:r>
-          </a:p>
-          <a:p>
-            <a:r>
-              <a:rPr sz="1600">
-                <a:solidFill>
-                  <a:srgbClr val="000000"/>
-                </a:solidFill>
-              </a:rPr>
-              <a:t>递归三要素：基线条件、递推关系、缩小规模</a:t>
+              <a:t>// 辗转相除法求GCD
+int gcd(int a, int b) {
+    if (b == 0) return a;
+    return gcd(b, a % b);
+}</a:t>
             </a:r>
           </a:p>
         </p:txBody>
@@ -3380,8 +3358,8 @@
         </p:nvSpPr>
         <p:spPr>
           <a:xfrm>
-            <a:off x="914400" y="457200"/>
-            <a:ext cx="10058400" cy="914400"/>
+            <a:off x="457200" y="274320"/>
+            <a:ext cx="10972800" cy="731520"/>
           </a:xfrm>
           <a:prstGeom prst="rect">
             <a:avLst/>
@@ -3395,12 +3373,12 @@
           <a:lstStyle/>
           <a:p>
             <a:r>
-              <a:rPr sz="2800" b="1">
+              <a:rPr sz="2400" b="1">
                 <a:solidFill>
                   <a:srgbClr val="8B0000"/>
                 </a:solidFill>
               </a:rPr>
-              <a:t>C++ 代码示例</a:t>
+              <a:t>Python 代码示例</a:t>
             </a:r>
           </a:p>
         </p:txBody>
@@ -3413,8 +3391,8 @@
         </p:nvSpPr>
         <p:spPr>
           <a:xfrm>
-            <a:off x="914400" y="1371600"/>
-            <a:ext cx="10058400" cy="5029200"/>
+            <a:off x="457200" y="1097280"/>
+            <a:ext cx="10972800" cy="5029200"/>
           </a:xfrm>
           <a:prstGeom prst="rect">
             <a:avLst/>
@@ -3429,15 +3407,16 @@
           <a:p/>
           <a:p>
             <a:r>
-              <a:rPr sz="1400">
+              <a:rPr sz="1200">
                 <a:solidFill>
                   <a:srgbClr val="000000"/>
                 </a:solidFill>
               </a:rPr>
-              <a:t>int gcd(int a, int b) {
-    if (b == 0) return a;
-    return gcd(b, a % b);
-}</a:t>
+              <a:t># 辗转相除法求GCD
+def gcd(a, b):
+    if b == 0:
+        return a
+    return gcd(b, a % b)</a:t>
             </a:r>
           </a:p>
         </p:txBody>
@@ -3468,8 +3447,8 @@
         </p:nvSpPr>
         <p:spPr>
           <a:xfrm>
-            <a:off x="914400" y="457200"/>
-            <a:ext cx="10058400" cy="914400"/>
+            <a:off x="457200" y="274320"/>
+            <a:ext cx="10972800" cy="731520"/>
           </a:xfrm>
           <a:prstGeom prst="rect">
             <a:avLst/>
@@ -3483,12 +3462,12 @@
           <a:lstStyle/>
           <a:p>
             <a:r>
-              <a:rPr sz="2800" b="1">
+              <a:rPr sz="2400" b="1">
                 <a:solidFill>
                   <a:srgbClr val="8B0000"/>
                 </a:solidFill>
               </a:rPr>
-              <a:t>Python 代码示例</a:t>
+              <a:t>常见错误</a:t>
             </a:r>
           </a:p>
         </p:txBody>
@@ -3501,8 +3480,8 @@
         </p:nvSpPr>
         <p:spPr>
           <a:xfrm>
-            <a:off x="914400" y="1371600"/>
-            <a:ext cx="10058400" cy="5029200"/>
+            <a:off x="457200" y="1097280"/>
+            <a:ext cx="10972800" cy="5029200"/>
           </a:xfrm>
           <a:prstGeom prst="rect">
             <a:avLst/>
@@ -3522,10 +3501,37 @@
                   <a:srgbClr val="000000"/>
                 </a:solidFill>
               </a:rPr>
-              <a:t>def gcd(a, b):
-    if b == 0:
-        return a
-    return gcd(b, a % b)</a:t>
+              <a:t>递归没有基线条件 → 栈溢出</a:t>
+            </a:r>
+          </a:p>
+          <a:p>
+            <a:r>
+              <a:rPr sz="1400">
+                <a:solidFill>
+                  <a:srgbClr val="000000"/>
+                </a:solidFill>
+              </a:rPr>
+              <a:t>忘记 return 返回值</a:t>
+            </a:r>
+          </a:p>
+          <a:p>
+            <a:r>
+              <a:rPr sz="1400">
+                <a:solidFill>
+                  <a:srgbClr val="000000"/>
+                </a:solidFill>
+              </a:rPr>
+              <a:t>C++引用参数用 &amp;，Python不需要</a:t>
+            </a:r>
+          </a:p>
+          <a:p>
+            <a:r>
+              <a:rPr sz="1400">
+                <a:solidFill>
+                  <a:srgbClr val="000000"/>
+                </a:solidFill>
+              </a:rPr>
+              <a:t>递归效率低，考虑记忆化（@lru_cache）</a:t>
             </a:r>
           </a:p>
         </p:txBody>
@@ -3556,8 +3562,8 @@
         </p:nvSpPr>
         <p:spPr>
           <a:xfrm>
-            <a:off x="914400" y="457200"/>
-            <a:ext cx="10058400" cy="914400"/>
+            <a:off x="457200" y="274320"/>
+            <a:ext cx="10972800" cy="731520"/>
           </a:xfrm>
           <a:prstGeom prst="rect">
             <a:avLst/>
@@ -3571,12 +3577,12 @@
           <a:lstStyle/>
           <a:p>
             <a:r>
-              <a:rPr sz="2800" b="1">
+              <a:rPr sz="2400" b="1">
                 <a:solidFill>
                   <a:srgbClr val="8B0000"/>
                 </a:solidFill>
               </a:rPr>
-              <a:t>常见错误</a:t>
+              <a:t>练习题目</a:t>
             </a:r>
           </a:p>
         </p:txBody>
@@ -3589,8 +3595,8 @@
         </p:nvSpPr>
         <p:spPr>
           <a:xfrm>
-            <a:off x="914400" y="1371600"/>
-            <a:ext cx="10058400" cy="5029200"/>
+            <a:off x="457200" y="1097280"/>
+            <a:ext cx="10972800" cy="5029200"/>
           </a:xfrm>
           <a:prstGeom prst="rect">
             <a:avLst/>
@@ -3605,42 +3611,32 @@
           <a:p/>
           <a:p>
             <a:r>
-              <a:rPr sz="1600">
+              <a:rPr sz="1400">
                 <a:solidFill>
                   <a:srgbClr val="000000"/>
                 </a:solidFill>
               </a:rPr>
-              <a:t>递归没有基线条件→栈溢出</a:t>
-            </a:r>
-          </a:p>
-          <a:p>
-            <a:r>
-              <a:rPr sz="1600">
+              <a:t>JD081 初窥阶乘 - 阶乘函数 (Easy)</a:t>
+            </a:r>
+          </a:p>
+          <a:p>
+            <a:r>
+              <a:rPr sz="1400">
                 <a:solidFill>
                   <a:srgbClr val="000000"/>
                 </a:solidFill>
               </a:rPr>
-              <a:t>忘记return返回值</a:t>
-            </a:r>
-          </a:p>
-          <a:p>
-            <a:r>
-              <a:rPr sz="1600">
+              <a:t>JD085 辗转相除 - GCD (Medium)</a:t>
+            </a:r>
+          </a:p>
+          <a:p>
+            <a:r>
+              <a:rPr sz="1400">
                 <a:solidFill>
                   <a:srgbClr val="000000"/>
                 </a:solidFill>
               </a:rPr>
-              <a:t>C++引用参数用&amp;，Python不需要</a:t>
-            </a:r>
-          </a:p>
-          <a:p>
-            <a:r>
-              <a:rPr sz="1600">
-                <a:solidFill>
-                  <a:srgbClr val="000000"/>
-                </a:solidFill>
-              </a:rPr>
-              <a:t>递归效率低，考虑记忆化</a:t>
+              <a:t>JD093 登阶问道 - 台阶问题 (Medium)</a:t>
             </a:r>
           </a:p>
         </p:txBody>
@@ -3671,8 +3667,8 @@
         </p:nvSpPr>
         <p:spPr>
           <a:xfrm>
-            <a:off x="914400" y="457200"/>
-            <a:ext cx="10058400" cy="914400"/>
+            <a:off x="457200" y="274320"/>
+            <a:ext cx="10972800" cy="731520"/>
           </a:xfrm>
           <a:prstGeom prst="rect">
             <a:avLst/>
@@ -3686,12 +3682,12 @@
           <a:lstStyle/>
           <a:p>
             <a:r>
-              <a:rPr sz="2800" b="1">
+              <a:rPr sz="2400" b="1">
                 <a:solidFill>
                   <a:srgbClr val="8B0000"/>
                 </a:solidFill>
               </a:rPr>
-              <a:t>练习题目</a:t>
+              <a:t>本章小结</a:t>
             </a:r>
           </a:p>
         </p:txBody>
@@ -3704,8 +3700,8 @@
         </p:nvSpPr>
         <p:spPr>
           <a:xfrm>
-            <a:off x="914400" y="1371600"/>
-            <a:ext cx="10058400" cy="5029200"/>
+            <a:off x="457200" y="1097280"/>
+            <a:ext cx="10972800" cy="5029200"/>
           </a:xfrm>
           <a:prstGeom prst="rect">
             <a:avLst/>
@@ -3720,147 +3716,42 @@
           <a:p/>
           <a:p>
             <a:r>
-              <a:rPr sz="1600">
+              <a:rPr sz="1400">
                 <a:solidFill>
                   <a:srgbClr val="000000"/>
                 </a:solidFill>
               </a:rPr>
-              <a:t>JD081 初窥阶乘</a:t>
-            </a:r>
-          </a:p>
-          <a:p>
-            <a:r>
-              <a:rPr sz="1600">
+              <a:t>本章学习了第7章的核心概念</a:t>
+            </a:r>
+          </a:p>
+          <a:p>
+            <a:r>
+              <a:rPr sz="1400">
                 <a:solidFill>
                   <a:srgbClr val="000000"/>
                 </a:solidFill>
               </a:rPr>
-              <a:t>JD085 辗转相除</a:t>
-            </a:r>
-          </a:p>
-          <a:p>
-            <a:r>
-              <a:rPr sz="1600">
+              <a:t>多做练习是掌握算法的关键</a:t>
+            </a:r>
+          </a:p>
+          <a:p>
+            <a:r>
+              <a:rPr sz="1400">
                 <a:solidFill>
                   <a:srgbClr val="000000"/>
                 </a:solidFill>
               </a:rPr>
-              <a:t>JD093 登阶问道</a:t>
-            </a:r>
-          </a:p>
-        </p:txBody>
-      </p:sp>
-    </p:spTree>
-  </p:cSld>
-  <p:clrMapOvr>
-    <a:masterClrMapping/>
-  </p:clrMapOvr>
-</p:sld>
-</file>
-
-<file path=ppt/slides/slide8.xml><?xml version="1.0" encoding="utf-8"?>
-<p:sld xmlns:a="http://schemas.openxmlformats.org/drawingml/2006/main" xmlns:p="http://schemas.openxmlformats.org/presentationml/2006/main" xmlns:r="http://schemas.openxmlformats.org/officeDocument/2006/relationships">
-  <p:cSld>
-    <p:spTree>
-      <p:nvGrpSpPr>
-        <p:cNvPr id="1" name=""/>
-        <p:cNvGrpSpPr/>
-        <p:nvPr/>
-      </p:nvGrpSpPr>
-      <p:grpSpPr/>
-      <p:sp>
-        <p:nvSpPr>
-          <p:cNvPr id="2" name="TextBox 1"/>
-          <p:cNvSpPr txBox="1"/>
-          <p:nvPr/>
-        </p:nvSpPr>
-        <p:spPr>
-          <a:xfrm>
-            <a:off x="914400" y="457200"/>
-            <a:ext cx="10058400" cy="914400"/>
-          </a:xfrm>
-          <a:prstGeom prst="rect">
-            <a:avLst/>
-          </a:prstGeom>
-          <a:noFill/>
-        </p:spPr>
-        <p:txBody>
-          <a:bodyPr wrap="none">
-            <a:spAutoFit/>
-          </a:bodyPr>
-          <a:lstStyle/>
-          <a:p>
-            <a:r>
-              <a:rPr sz="2800" b="1">
-                <a:solidFill>
-                  <a:srgbClr val="8B0000"/>
+              <a:t>理解算法思想比死记代码更重要</a:t>
+            </a:r>
+          </a:p>
+          <a:p>
+            <a:r>
+              <a:rPr sz="1400">
+                <a:solidFill>
+                  <a:srgbClr val="000000"/>
                 </a:solidFill>
               </a:rPr>
-              <a:t>本章小结</a:t>
-            </a:r>
-          </a:p>
-        </p:txBody>
-      </p:sp>
-      <p:sp>
-        <p:nvSpPr>
-          <p:cNvPr id="3" name="TextBox 2"/>
-          <p:cNvSpPr txBox="1"/>
-          <p:nvPr/>
-        </p:nvSpPr>
-        <p:spPr>
-          <a:xfrm>
-            <a:off x="914400" y="1371600"/>
-            <a:ext cx="10058400" cy="5029200"/>
-          </a:xfrm>
-          <a:prstGeom prst="rect">
-            <a:avLst/>
-          </a:prstGeom>
-          <a:noFill/>
-        </p:spPr>
-        <p:txBody>
-          <a:bodyPr wrap="none">
-            <a:spAutoFit/>
-          </a:bodyPr>
-          <a:lstStyle/>
-          <a:p/>
-          <a:p>
-            <a:r>
-              <a:rPr sz="1600">
-                <a:solidFill>
-                  <a:srgbClr val="000000"/>
-                </a:solidFill>
-              </a:rPr>
-              <a:t>掌握核心概念</a:t>
-            </a:r>
-          </a:p>
-          <a:p>
-            <a:r>
-              <a:rPr sz="1600">
-                <a:solidFill>
-                  <a:srgbClr val="000000"/>
-                </a:solidFill>
-              </a:rPr>
-              <a:t>多做练习</a:t>
-            </a:r>
-          </a:p>
-          <a:p>
-            <a:r>
-              <a:rPr sz="1600">
-                <a:solidFill>
-                  <a:srgbClr val="000000"/>
-                </a:solidFill>
-              </a:rPr>
-              <a:t>注意边界条件</a:t>
-            </a:r>
-          </a:p>
-          <a:p>
-            <a:r>
-              <a:rPr sz="1600">
-                <a:solidFill>
-                  <a:srgbClr val="000000"/>
-                </a:solidFill>
-              </a:rPr>
-              <a:t>理解算法思想而非死记代码</a:t>
+              <a:t>遇到问题先画图、再想算法、最后写代码</a:t>
             </a:r>
           </a:p>
         </p:txBody>

--- a/textbook/ppt/chapter07_ppt.pptx
+++ b/textbook/ppt/chapter07_ppt.pptx
@@ -12,6 +12,7 @@
     <p:sldId id="260" r:id="rId11"/>
     <p:sldId id="261" r:id="rId12"/>
     <p:sldId id="262" r:id="rId13"/>
+    <p:sldId id="263" r:id="rId14"/>
   </p:sldIdLst>
   <p:sldSz cx="12188952" cy="6858000" type="screen4x3"/>
   <p:notesSz cx="6858000" cy="9144000"/>
@@ -3752,6 +3753,91 @@
                 </a:solidFill>
               </a:rPr>
               <a:t>遇到问题先画图、再想算法、最后写代码</a:t>
+            </a:r>
+          </a:p>
+        </p:txBody>
+      </p:sp>
+    </p:spTree>
+  </p:cSld>
+  <p:clrMapOvr>
+    <a:masterClrMapping/>
+  </p:clrMapOvr>
+</p:sld>
+</file>
+
+<file path=ppt/slides/slide8.xml><?xml version="1.0" encoding="utf-8"?>
+<p:sld xmlns:a="http://schemas.openxmlformats.org/drawingml/2006/main" xmlns:p="http://schemas.openxmlformats.org/presentationml/2006/main" xmlns:r="http://schemas.openxmlformats.org/officeDocument/2006/relationships">
+  <p:cSld>
+    <p:spTree>
+      <p:nvGrpSpPr>
+        <p:cNvPr id="1" name=""/>
+        <p:cNvGrpSpPr/>
+        <p:nvPr/>
+      </p:nvGrpSpPr>
+      <p:grpSpPr/>
+      <p:sp>
+        <p:nvSpPr>
+          <p:cNvPr id="2" name="TextBox 1"/>
+          <p:cNvSpPr txBox="1"/>
+          <p:nvPr/>
+        </p:nvSpPr>
+        <p:spPr>
+          <a:xfrm>
+            <a:off x="457200" y="274320"/>
+            <a:ext cx="10972800" cy="731520"/>
+          </a:xfrm>
+          <a:prstGeom prst="rect">
+            <a:avLst/>
+          </a:prstGeom>
+          <a:noFill/>
+        </p:spPr>
+        <p:txBody>
+          <a:bodyPr wrap="none">
+            <a:spAutoFit/>
+          </a:bodyPr>
+          <a:lstStyle/>
+          <a:p>
+            <a:r>
+              <a:rPr sz="2400" b="1">
+                <a:solidFill>
+                  <a:srgbClr val="8B0000"/>
+                </a:solidFill>
+              </a:rPr>
+              <a:t>本章概览</a:t>
+            </a:r>
+          </a:p>
+        </p:txBody>
+      </p:sp>
+      <p:sp>
+        <p:nvSpPr>
+          <p:cNvPr id="3" name="TextBox 2"/>
+          <p:cNvSpPr txBox="1"/>
+          <p:nvPr/>
+        </p:nvSpPr>
+        <p:spPr>
+          <a:xfrm>
+            <a:off x="457200" y="1097280"/>
+            <a:ext cx="10972800" cy="5029200"/>
+          </a:xfrm>
+          <a:prstGeom prst="rect">
+            <a:avLst/>
+          </a:prstGeom>
+          <a:noFill/>
+        </p:spPr>
+        <p:txBody>
+          <a:bodyPr wrap="none">
+            <a:spAutoFit/>
+          </a:bodyPr>
+          <a:lstStyle/>
+          <a:p/>
+          <a:p>
+            <a:r>
+              <a:rPr sz="1600">
+                <a:solidFill>
+                  <a:srgbClr val="000000"/>
+                </a:solidFill>
+              </a:rPr>
+              <a:t>本章学习函数封装和递归——将重复逻辑封装成函数，用递归解决分治问题。</a:t>
             </a:r>
           </a:p>
         </p:txBody>

--- a/textbook/ppt/chapter07_ppt.pptx
+++ b/textbook/ppt/chapter07_ppt.pptx
@@ -13,6 +13,7 @@
     <p:sldId id="261" r:id="rId12"/>
     <p:sldId id="262" r:id="rId13"/>
     <p:sldId id="263" r:id="rId14"/>
+    <p:sldId id="264" r:id="rId15"/>
   </p:sldIdLst>
   <p:sldSz cx="12188952" cy="6858000" type="screen4x3"/>
   <p:notesSz cx="6858000" cy="9144000"/>
@@ -3722,7 +3723,7 @@
                   <a:srgbClr val="000000"/>
                 </a:solidFill>
               </a:rPr>
-              <a:t>本章学习了第7章的核心概念</a:t>
+              <a:t/>
             </a:r>
           </a:p>
           <a:p>
@@ -3732,7 +3733,7 @@
                   <a:srgbClr val="000000"/>
                 </a:solidFill>
               </a:rPr>
-              <a:t>多做练习是掌握算法的关键</a:t>
+              <a:t/>
             </a:r>
           </a:p>
           <a:p>
@@ -3742,7 +3743,7 @@
                   <a:srgbClr val="000000"/>
                 </a:solidFill>
               </a:rPr>
-              <a:t>理解算法思想比死记代码更重要</a:t>
+              <a:t/>
             </a:r>
           </a:p>
           <a:p>
@@ -3752,7 +3753,7 @@
                   <a:srgbClr val="000000"/>
                 </a:solidFill>
               </a:rPr>
-              <a:t>遇到问题先画图、再想算法、最后写代码</a:t>
+              <a:t/>
             </a:r>
           </a:p>
         </p:txBody>
@@ -3838,6 +3839,121 @@
                 </a:solidFill>
               </a:rPr>
               <a:t>本章学习函数封装和递归——将重复逻辑封装成函数，用递归解决分治问题。</a:t>
+            </a:r>
+          </a:p>
+        </p:txBody>
+      </p:sp>
+    </p:spTree>
+  </p:cSld>
+  <p:clrMapOvr>
+    <a:masterClrMapping/>
+  </p:clrMapOvr>
+</p:sld>
+</file>
+
+<file path=ppt/slides/slide9.xml><?xml version="1.0" encoding="utf-8"?>
+<p:sld xmlns:a="http://schemas.openxmlformats.org/drawingml/2006/main" xmlns:p="http://schemas.openxmlformats.org/presentationml/2006/main" xmlns:r="http://schemas.openxmlformats.org/officeDocument/2006/relationships">
+  <p:cSld>
+    <p:spTree>
+      <p:nvGrpSpPr>
+        <p:cNvPr id="1" name=""/>
+        <p:cNvGrpSpPr/>
+        <p:nvPr/>
+      </p:nvGrpSpPr>
+      <p:grpSpPr/>
+      <p:sp>
+        <p:nvSpPr>
+          <p:cNvPr id="2" name="TextBox 1"/>
+          <p:cNvSpPr txBox="1"/>
+          <p:nvPr/>
+        </p:nvSpPr>
+        <p:spPr>
+          <a:xfrm>
+            <a:off x="457200" y="274320"/>
+            <a:ext cx="10972800" cy="731520"/>
+          </a:xfrm>
+          <a:prstGeom prst="rect">
+            <a:avLst/>
+          </a:prstGeom>
+          <a:noFill/>
+        </p:spPr>
+        <p:txBody>
+          <a:bodyPr wrap="none">
+            <a:spAutoFit/>
+          </a:bodyPr>
+          <a:lstStyle/>
+          <a:p>
+            <a:r>
+              <a:rPr sz="2400" b="1">
+                <a:solidFill>
+                  <a:srgbClr val="8B0000"/>
+                </a:solidFill>
+              </a:rPr>
+              <a:t>第7章 核心要点</a:t>
+            </a:r>
+          </a:p>
+        </p:txBody>
+      </p:sp>
+      <p:sp>
+        <p:nvSpPr>
+          <p:cNvPr id="3" name="TextBox 2"/>
+          <p:cNvSpPr txBox="1"/>
+          <p:nvPr/>
+        </p:nvSpPr>
+        <p:spPr>
+          <a:xfrm>
+            <a:off x="457200" y="1097280"/>
+            <a:ext cx="10972800" cy="5029200"/>
+          </a:xfrm>
+          <a:prstGeom prst="rect">
+            <a:avLst/>
+          </a:prstGeom>
+          <a:noFill/>
+        </p:spPr>
+        <p:txBody>
+          <a:bodyPr wrap="none">
+            <a:spAutoFit/>
+          </a:bodyPr>
+          <a:lstStyle/>
+          <a:p/>
+          <a:p>
+            <a:r>
+              <a:rPr sz="1600">
+                <a:solidFill>
+                  <a:srgbClr val="000000"/>
+                </a:solidFill>
+              </a:rPr>
+              <a:t>• 函数的定义、调用和返回值</a:t>
+            </a:r>
+          </a:p>
+          <a:p>
+            <a:r>
+              <a:rPr sz="1600">
+                <a:solidFill>
+                  <a:srgbClr val="000000"/>
+                </a:solidFill>
+              </a:rPr>
+              <a:t>• 参数传递：值传递 vs 引用传递</a:t>
+            </a:r>
+          </a:p>
+          <a:p>
+            <a:r>
+              <a:rPr sz="1600">
+                <a:solidFill>
+                  <a:srgbClr val="000000"/>
+                </a:solidFill>
+              </a:rPr>
+              <a:t>• 递归三要素：基线、递推、缩小</a:t>
+            </a:r>
+          </a:p>
+          <a:p>
+            <a:r>
+              <a:rPr sz="1600">
+                <a:solidFill>
+                  <a:srgbClr val="000000"/>
+                </a:solidFill>
+              </a:rPr>
+              <a:t>• 递归 vs 迭代的选择</a:t>
             </a:r>
           </a:p>
         </p:txBody>
